--- a/Fase 2/Evidencias Proyecto/Presentación Proyecto.pptx
+++ b/Fase 2/Evidencias Proyecto/Presentación Proyecto.pptx
@@ -3933,7 +3933,7 @@
                 <a:cs typeface="DM Sans"/>
                 <a:sym typeface="DM Sans"/>
               </a:rPr>
-              <a:t>Esto afecta negativamente la experiencia de compra, para personas de distintas capacidades y culturas</a:t>
+              <a:t>Esto afecta negativamente la experiencia de compra y gestión, para personas de distintas capacidades y culturas</a:t>
             </a:r>
           </a:p>
         </p:txBody>
@@ -7373,9 +7373,9 @@
         <p:grpSpPr>
           <a:xfrm rot="0">
             <a:off x="12257556" y="2643502"/>
-            <a:ext cx="5001744" cy="4634261"/>
+            <a:ext cx="5001744" cy="5091461"/>
             <a:chOff x="0" y="0"/>
-            <a:chExt cx="6668992" cy="6179014"/>
+            <a:chExt cx="6668992" cy="6788614"/>
           </a:xfrm>
         </p:grpSpPr>
         <p:sp>
@@ -7387,7 +7387,7 @@
           <p:spPr>
             <a:xfrm rot="0">
               <a:off x="0" y="1342336"/>
-              <a:ext cx="6668992" cy="4836678"/>
+              <a:ext cx="6668992" cy="5446278"/>
             </a:xfrm>
             <a:prstGeom prst="rect">
               <a:avLst/>
@@ -7458,7 +7458,7 @@
               </a:pPr>
             </a:p>
             <a:p>
-              <a:pPr algn="just" marL="559386" indent="-279693" lvl="1">
+              <a:pPr algn="l" marL="559386" indent="-279693" lvl="1">
                 <a:lnSpc>
                   <a:spcPts val="3627"/>
                 </a:lnSpc>
@@ -7475,7 +7475,7 @@
                   <a:cs typeface="DM Sans"/>
                   <a:sym typeface="DM Sans"/>
                 </a:rPr>
-                <a:t>Beneficio: Genera comunidad.</a:t>
+                <a:t>Beneficio: Genera comunidad e incentiva las adopciones.</a:t>
               </a:r>
             </a:p>
             <a:p>
